--- a/보장분석지_한은주.pptx
+++ b/보장분석지_한은주.pptx
@@ -3690,7 +3690,7 @@
                 <a:latin typeface="HY엽서M" panose="02030600000101010101" pitchFamily="18" charset="-127"/>
                 <a:ea typeface="HY엽서M" panose="02030600000101010101" pitchFamily="18" charset="-127"/>
               </a:rPr>
-              <a:t>2026년 07월 02일 기준</a:t>
+              <a:t>2026년 07월 03일 기준</a:t>
             </a:r>
           </a:p>
         </p:txBody>
@@ -4118,7 +4118,7 @@
                 <a:ea typeface="HY엽서M" panose="02030600000101010101" pitchFamily="18" charset="-127"/>
               </a:rPr>
               <a:t>뇌혈관
-1,000</a:t>
+2,000</a:t>
             </a:r>
           </a:p>
         </p:txBody>
@@ -4447,7 +4447,7 @@
           <a:p>
             <a:pPr algn="ctr"/>
             <a:r>
-              <a:rPr lang="ko-KR" altLang="en-US" sz="990" dirty="0">
+              <a:rPr lang="ko-KR" altLang="en-US" sz="1100" dirty="0">
                 <a:solidFill>
                   <a:srgbClr val="000000"/>
                 </a:solidFill>
@@ -4455,7 +4455,7 @@
                 <a:ea typeface="HY엽서M" panose="02030600000101010101" pitchFamily="18" charset="-127"/>
               </a:rPr>
               <a:t>급성심근
-1,200</a:t>
+700</a:t>
             </a:r>
           </a:p>
         </p:txBody>
@@ -6556,22 +6556,12 @@
             <a:r>
               <a:rPr lang="en-US" altLang="ko-KR" sz="1200" dirty="0">
                 <a:solidFill>
-                  <a:srgbClr val="0000FF"/>
-                </a:solidFill>
-                <a:latin typeface="HY엽서M" panose="02030600000101010101" pitchFamily="18" charset="-127"/>
-                <a:ea typeface="HY엽서M" panose="02030600000101010101" pitchFamily="18" charset="-127"/>
-              </a:rPr>
-              <a:t>: 1,000</a:t>
-            </a:r>
-            <a:r>
-              <a:rPr lang="en-US" altLang="ko-KR" sz="1200" dirty="0">
-                <a:solidFill>
                   <a:srgbClr val="000000"/>
                 </a:solidFill>
                 <a:latin typeface="HY엽서M" panose="02030600000101010101" pitchFamily="18" charset="-127"/>
                 <a:ea typeface="HY엽서M" panose="02030600000101010101" pitchFamily="18" charset="-127"/>
               </a:rPr>
-              <a:t>+7,220</a:t>
+              <a:t>: 11,820</a:t>
             </a:r>
           </a:p>
         </p:txBody>
@@ -6913,7 +6903,7 @@
                 <a:latin typeface="HY엽서M" panose="02030600000101010101" pitchFamily="18" charset="-127"/>
                 <a:ea typeface="HY엽서M" panose="02030600000101010101" pitchFamily="18" charset="-127"/>
               </a:rPr>
-              <a:t>: 2,000 / </a:t>
+              <a:t>: 1,000 / </a:t>
             </a:r>
             <a:r>
               <a:rPr lang="ko-KR" altLang="en-US" sz="1050" dirty="0" err="1">
